--- a/public/slides/aa174a/lecture_4.pptx
+++ b/public/slides/aa174a/lecture_4.pptx
@@ -166,12 +166,74 @@
 </p:presentation>
 </file>
 
-<file path=ppt/revisionInfo.xml><?xml version="1.0" encoding="utf-8"?>
-<p1510:revInfo xmlns:a="http://schemas.openxmlformats.org/drawingml/2006/main" xmlns:r="http://schemas.openxmlformats.org/officeDocument/2006/relationships" xmlns:p1510="http://schemas.microsoft.com/office/powerpoint/2015/10/main">
-  <p1510:revLst>
-    <p1510:client id="{6A1EACDA-AD94-B641-9047-C7F20AFD01B1}" v="14" dt="2025-10-07T00:37:16.098"/>
-  </p1510:revLst>
-</p1510:revInfo>
+<file path=ppt/changesInfos/changesInfo1.xml><?xml version="1.0" encoding="utf-8"?>
+<pc:chgInfo xmlns:a="http://schemas.openxmlformats.org/drawingml/2006/main" xmlns:r="http://schemas.openxmlformats.org/officeDocument/2006/relationships" xmlns:ac="http://schemas.microsoft.com/office/drawing/2013/main/command" xmlns:pc="http://schemas.microsoft.com/office/powerpoint/2013/main/command">
+  <pc:docChgLst>
+    <pc:chgData name="Daniele Gammelli" userId="292b8a31-f1ba-4b4c-b196-a231dc095d13" providerId="ADAL" clId="{6E670754-AB6A-5789-AA0A-6F6FD9CE3EEA}"/>
+    <pc:docChg chg="modSld">
+      <pc:chgData name="Daniele Gammelli" userId="292b8a31-f1ba-4b4c-b196-a231dc095d13" providerId="ADAL" clId="{6E670754-AB6A-5789-AA0A-6F6FD9CE3EEA}" dt="2026-08-13T22:46:10.679" v="7" actId="20577"/>
+      <pc:docMkLst>
+        <pc:docMk/>
+      </pc:docMkLst>
+      <pc:sldChg chg="modNotesTx">
+        <pc:chgData name="Daniele Gammelli" userId="292b8a31-f1ba-4b4c-b196-a231dc095d13" providerId="ADAL" clId="{6E670754-AB6A-5789-AA0A-6F6FD9CE3EEA}" dt="2026-08-13T22:45:49.139" v="0" actId="20577"/>
+        <pc:sldMkLst>
+          <pc:docMk/>
+          <pc:sldMk cId="2127083319" sldId="337"/>
+        </pc:sldMkLst>
+      </pc:sldChg>
+      <pc:sldChg chg="modNotesTx">
+        <pc:chgData name="Daniele Gammelli" userId="292b8a31-f1ba-4b4c-b196-a231dc095d13" providerId="ADAL" clId="{6E670754-AB6A-5789-AA0A-6F6FD9CE3EEA}" dt="2026-08-13T22:45:51.471" v="1" actId="20577"/>
+        <pc:sldMkLst>
+          <pc:docMk/>
+          <pc:sldMk cId="1977322933" sldId="338"/>
+        </pc:sldMkLst>
+      </pc:sldChg>
+      <pc:sldChg chg="modNotesTx">
+        <pc:chgData name="Daniele Gammelli" userId="292b8a31-f1ba-4b4c-b196-a231dc095d13" providerId="ADAL" clId="{6E670754-AB6A-5789-AA0A-6F6FD9CE3EEA}" dt="2026-08-13T22:45:55.237" v="2" actId="20577"/>
+        <pc:sldMkLst>
+          <pc:docMk/>
+          <pc:sldMk cId="1742142696" sldId="340"/>
+        </pc:sldMkLst>
+      </pc:sldChg>
+      <pc:sldChg chg="modNotesTx">
+        <pc:chgData name="Daniele Gammelli" userId="292b8a31-f1ba-4b4c-b196-a231dc095d13" providerId="ADAL" clId="{6E670754-AB6A-5789-AA0A-6F6FD9CE3EEA}" dt="2026-08-13T22:45:57.564" v="3" actId="20577"/>
+        <pc:sldMkLst>
+          <pc:docMk/>
+          <pc:sldMk cId="2081290362" sldId="342"/>
+        </pc:sldMkLst>
+      </pc:sldChg>
+      <pc:sldChg chg="modNotesTx">
+        <pc:chgData name="Daniele Gammelli" userId="292b8a31-f1ba-4b4c-b196-a231dc095d13" providerId="ADAL" clId="{6E670754-AB6A-5789-AA0A-6F6FD9CE3EEA}" dt="2026-08-13T22:46:02.038" v="4" actId="20577"/>
+        <pc:sldMkLst>
+          <pc:docMk/>
+          <pc:sldMk cId="3412605029" sldId="347"/>
+        </pc:sldMkLst>
+      </pc:sldChg>
+      <pc:sldChg chg="modNotesTx">
+        <pc:chgData name="Daniele Gammelli" userId="292b8a31-f1ba-4b4c-b196-a231dc095d13" providerId="ADAL" clId="{6E670754-AB6A-5789-AA0A-6F6FD9CE3EEA}" dt="2026-08-13T22:46:08.728" v="6" actId="20577"/>
+        <pc:sldMkLst>
+          <pc:docMk/>
+          <pc:sldMk cId="3552068747" sldId="348"/>
+        </pc:sldMkLst>
+      </pc:sldChg>
+      <pc:sldChg chg="modNotesTx">
+        <pc:chgData name="Daniele Gammelli" userId="292b8a31-f1ba-4b4c-b196-a231dc095d13" providerId="ADAL" clId="{6E670754-AB6A-5789-AA0A-6F6FD9CE3EEA}" dt="2026-08-13T22:46:04.256" v="5" actId="20577"/>
+        <pc:sldMkLst>
+          <pc:docMk/>
+          <pc:sldMk cId="832643236" sldId="349"/>
+        </pc:sldMkLst>
+      </pc:sldChg>
+      <pc:sldChg chg="modNotesTx">
+        <pc:chgData name="Daniele Gammelli" userId="292b8a31-f1ba-4b4c-b196-a231dc095d13" providerId="ADAL" clId="{6E670754-AB6A-5789-AA0A-6F6FD9CE3EEA}" dt="2026-08-13T22:46:10.679" v="7" actId="20577"/>
+        <pc:sldMkLst>
+          <pc:docMk/>
+          <pc:sldMk cId="2716331048" sldId="356"/>
+        </pc:sldMkLst>
+      </pc:sldChg>
+    </pc:docChg>
+  </pc:docChgLst>
+</pc:chgInfo>
 </file>
 
 <file path=ppt/notesMasters/notesMaster1.xml><?xml version="1.0" encoding="utf-8"?>
@@ -256,7 +318,7 @@
           <a:p>
             <a:fld id="{EBD6F028-2067-3740-AA48-A91E93570B1D}" type="datetimeFigureOut">
               <a:rPr lang="en-US" smtClean="0"/>
-              <a:t>12/20/2025</a:t>
+              <a:t>8/13/26</a:t>
             </a:fld>
             <a:endParaRPr lang="en-US"/>
           </a:p>
@@ -655,131 +717,7 @@
               <a:buFont typeface="Arial" panose="020B0604020202020204" pitchFamily="34" charset="0"/>
               <a:buChar char="•"/>
             </a:pPr>
-            <a:r>
-              <a:rPr lang="en-US" sz="1200" kern="1200" err="1">
-                <a:solidFill>
-                  <a:schemeClr val="tx1"/>
-                </a:solidFill>
-                <a:latin typeface="+mn-lt"/>
-                <a:ea typeface="+mn-ea"/>
-                <a:cs typeface="+mn-cs"/>
-              </a:rPr>
-              <a:t>scipy.integrate</a:t>
-            </a:r>
-            <a:r>
-              <a:rPr lang="en-US"/>
-              <a:t> is a subpackage of </a:t>
-            </a:r>
-            <a:r>
-              <a:rPr lang="en-US" b="1"/>
-              <a:t>SciPy</a:t>
-            </a:r>
-            <a:r>
-              <a:rPr lang="en-US"/>
-              <a:t> that provides functions for performing </a:t>
-            </a:r>
-            <a:r>
-              <a:rPr lang="en-US" b="1"/>
-              <a:t>numerical integration</a:t>
-            </a:r>
-            <a:r>
-              <a:rPr lang="en-US"/>
-              <a:t> (also called quadrature) and solving </a:t>
-            </a:r>
-            <a:r>
-              <a:rPr lang="en-US" b="1"/>
-              <a:t>ordinary differential equations (ODEs)</a:t>
-            </a:r>
-            <a:r>
-              <a:rPr lang="en-US"/>
-              <a:t>.</a:t>
-            </a:r>
-          </a:p>
-          <a:p>
-            <a:pPr marL="171450" indent="-171450">
-              <a:buFont typeface="Arial" panose="020B0604020202020204" pitchFamily="34" charset="0"/>
-              <a:buChar char="•"/>
-            </a:pPr>
-            <a:r>
-              <a:rPr lang="en-US" sz="1200" kern="1200" err="1">
-                <a:solidFill>
-                  <a:schemeClr val="tx1"/>
-                </a:solidFill>
-                <a:latin typeface="+mn-lt"/>
-                <a:ea typeface="+mn-ea"/>
-                <a:cs typeface="+mn-cs"/>
-              </a:rPr>
-              <a:t>odeint</a:t>
-            </a:r>
-            <a:r>
-              <a:rPr lang="en-US"/>
-              <a:t> is a function in </a:t>
-            </a:r>
-            <a:r>
-              <a:rPr lang="en-US" sz="1200" kern="1200" err="1">
-                <a:solidFill>
-                  <a:schemeClr val="tx1"/>
-                </a:solidFill>
-                <a:latin typeface="+mn-lt"/>
-                <a:ea typeface="+mn-ea"/>
-                <a:cs typeface="+mn-cs"/>
-              </a:rPr>
-              <a:t>scipy.integrate</a:t>
-            </a:r>
-            <a:r>
-              <a:rPr lang="en-US"/>
-              <a:t> used to </a:t>
-            </a:r>
-            <a:r>
-              <a:rPr lang="en-US" b="1"/>
-              <a:t>solve ordinary differential equations (ODEs)</a:t>
-            </a:r>
-            <a:r>
-              <a:rPr lang="en-US"/>
-              <a:t> numerically.</a:t>
-            </a:r>
-          </a:p>
-          <a:p>
-            <a:pPr marL="171450" indent="-171450">
-              <a:buFont typeface="Arial" panose="020B0604020202020204" pitchFamily="34" charset="0"/>
-              <a:buChar char="•"/>
-            </a:pPr>
-            <a:r>
-              <a:rPr lang="en-US"/>
-              <a:t>Signature: </a:t>
-            </a:r>
-            <a:r>
-              <a:rPr lang="en-US" err="1"/>
-              <a:t>scipy.integrate.odeint</a:t>
-            </a:r>
-            <a:r>
-              <a:rPr lang="en-US"/>
-              <a:t>(</a:t>
-            </a:r>
-            <a:r>
-              <a:rPr lang="en-US" err="1"/>
-              <a:t>func</a:t>
-            </a:r>
-            <a:r>
-              <a:rPr lang="en-US"/>
-              <a:t>, y0, t, </a:t>
-            </a:r>
-            <a:r>
-              <a:rPr lang="en-US" err="1"/>
-              <a:t>args</a:t>
-            </a:r>
-            <a:r>
-              <a:rPr lang="en-US"/>
-              <a:t>=(), </a:t>
-            </a:r>
-            <a:r>
-              <a:rPr lang="en-US" err="1"/>
-              <a:t>Dfun</a:t>
-            </a:r>
-            <a:r>
-              <a:rPr lang="en-US"/>
-              <a:t>=None, ...)</a:t>
-            </a:r>
+            <a:endParaRPr lang="en-US" dirty="0"/>
           </a:p>
         </p:txBody>
       </p:sp>
@@ -863,7 +801,7 @@
           <a:bodyPr/>
           <a:lstStyle/>
           <a:p>
-            <a:endParaRPr lang="en-US"/>
+            <a:endParaRPr lang="en-US" dirty="0"/>
           </a:p>
         </p:txBody>
       </p:sp>
@@ -951,93 +889,13 @@
               <a:buFont typeface="Arial" panose="020B0604020202020204" pitchFamily="34" charset="0"/>
               <a:buChar char="•"/>
             </a:pPr>
-            <a:r>
-              <a:rPr lang="en-US" b="0" i="0" dirty="0">
-                <a:solidFill>
-                  <a:srgbClr val="212121"/>
-                </a:solidFill>
-                <a:effectLst/>
-                <a:latin typeface="Roboto" panose="020F0502020204030204" pitchFamily="34" charset="0"/>
-              </a:rPr>
-              <a:t>Automatic differentiation is a set of techniques for evaluating derivatives (gradients) numerically. </a:t>
-            </a:r>
-          </a:p>
-          <a:p>
-            <a:pPr marL="171450" indent="-171450">
-              <a:buFont typeface="Arial" panose="020B0604020202020204" pitchFamily="34" charset="0"/>
-              <a:buChar char="•"/>
-            </a:pPr>
-            <a:r>
-              <a:rPr lang="en-US" b="0" i="0" dirty="0">
-                <a:solidFill>
-                  <a:srgbClr val="212121"/>
-                </a:solidFill>
-                <a:effectLst/>
-                <a:latin typeface="Roboto" panose="020F0502020204030204" pitchFamily="34" charset="0"/>
-              </a:rPr>
-              <a:t>Automatic differentiation is not symbolic differentiation (like in Mathematica) and not numerical differentiation (finite differences). Instead, it works by systematically applying the chain rule to the sequence of operations in a program. This gives exact derivatives up to machine precision.</a:t>
-            </a:r>
-          </a:p>
-          <a:p>
-            <a:pPr marL="171450" marR="0" lvl="0" indent="-171450" algn="l" defTabSz="914400" rtl="0" eaLnBrk="1" fontAlgn="auto" latinLnBrk="0" hangingPunct="1">
-              <a:lnSpc>
-                <a:spcPct val="100000"/>
-              </a:lnSpc>
-              <a:spcBef>
-                <a:spcPts val="0"/>
-              </a:spcBef>
-              <a:spcAft>
-                <a:spcPts val="0"/>
-              </a:spcAft>
-              <a:buClrTx/>
-              <a:buSzTx/>
-              <a:buFont typeface="Arial" panose="020B0604020202020204" pitchFamily="34" charset="0"/>
-              <a:buChar char="•"/>
-              <a:tabLst/>
-              <a:defRPr/>
-            </a:pPr>
-            <a:r>
-              <a:rPr lang="en-US" b="0" i="0" dirty="0">
-                <a:solidFill>
-                  <a:srgbClr val="222832"/>
-                </a:solidFill>
-                <a:effectLst/>
-                <a:latin typeface="-apple-system"/>
-              </a:rPr>
-              <a:t>JAX provides a familiar NumPy-style API for ease of adoption by researchers and engineers.</a:t>
-            </a:r>
-          </a:p>
-          <a:p>
-            <a:pPr marL="171450" indent="-171450">
-              <a:buFont typeface="Arial" panose="020B0604020202020204" pitchFamily="34" charset="0"/>
-              <a:buChar char="•"/>
-            </a:pPr>
-            <a:r>
-              <a:rPr lang="en-US" b="0" i="0" dirty="0">
-                <a:solidFill>
-                  <a:srgbClr val="222832"/>
-                </a:solidFill>
-                <a:effectLst/>
-                <a:latin typeface="-apple-system"/>
-              </a:rPr>
-              <a:t> </a:t>
-            </a:r>
-            <a:r>
-              <a:rPr lang="en-US" dirty="0">
-                <a:effectLst/>
-              </a:rPr>
-              <a:t>grad(f)</a:t>
-            </a:r>
-            <a:r>
-              <a:rPr lang="en-US" b="0" i="0" dirty="0">
-                <a:solidFill>
-                  <a:srgbClr val="222832"/>
-                </a:solidFill>
-                <a:effectLst/>
-                <a:latin typeface="-apple-system"/>
-              </a:rPr>
-              <a:t> is a Python function that evaluates the mathematical function ∇f</a:t>
-            </a:r>
+            <a:endParaRPr lang="en-US" b="0" i="0" dirty="0">
+              <a:solidFill>
+                <a:srgbClr val="222832"/>
+              </a:solidFill>
+              <a:effectLst/>
+              <a:latin typeface="-apple-system"/>
+            </a:endParaRPr>
           </a:p>
         </p:txBody>
       </p:sp>
@@ -1125,162 +983,6 @@
               <a:buFont typeface="Arial" panose="020B0604020202020204" pitchFamily="34" charset="0"/>
               <a:buChar char="•"/>
             </a:pPr>
-            <a:r>
-              <a:rPr lang="en-US" sz="1200" kern="1200" dirty="0" err="1">
-                <a:solidFill>
-                  <a:schemeClr val="tx1"/>
-                </a:solidFill>
-                <a:latin typeface="+mn-lt"/>
-                <a:ea typeface="+mn-ea"/>
-                <a:cs typeface="+mn-cs"/>
-              </a:rPr>
-              <a:t>jax.jacobian</a:t>
-            </a:r>
-            <a:r>
-              <a:rPr lang="en-US" dirty="0"/>
-              <a:t> is a function in </a:t>
-            </a:r>
-            <a:r>
-              <a:rPr lang="en-US" b="1" dirty="0"/>
-              <a:t>JAX</a:t>
-            </a:r>
-            <a:r>
-              <a:rPr lang="en-US" dirty="0"/>
-              <a:t> used to compute the </a:t>
-            </a:r>
-            <a:r>
-              <a:rPr lang="en-US" b="1" dirty="0"/>
-              <a:t>Jacobian matrix</a:t>
-            </a:r>
-            <a:r>
-              <a:rPr lang="en-US" dirty="0"/>
-              <a:t> of a function automatically via </a:t>
-            </a:r>
-            <a:r>
-              <a:rPr lang="en-US" b="1" dirty="0"/>
-              <a:t>automatic differentiation (</a:t>
-            </a:r>
-            <a:r>
-              <a:rPr lang="en-US" b="1" dirty="0" err="1"/>
-              <a:t>autodiff</a:t>
-            </a:r>
-            <a:r>
-              <a:rPr lang="en-US" b="1" dirty="0"/>
-              <a:t>)</a:t>
-            </a:r>
-            <a:r>
-              <a:rPr lang="en-US" dirty="0"/>
-              <a:t>. </a:t>
-            </a:r>
-          </a:p>
-          <a:p>
-            <a:pPr marL="171450" indent="-171450">
-              <a:buFont typeface="Arial" panose="020B0604020202020204" pitchFamily="34" charset="0"/>
-              <a:buChar char="•"/>
-            </a:pPr>
-            <a:r>
-              <a:rPr lang="en-US"/>
-              <a:t>Signature</a:t>
-            </a:r>
-            <a:r>
-              <a:rPr lang="en-US" dirty="0"/>
-              <a:t>: </a:t>
-            </a:r>
-            <a:r>
-              <a:rPr lang="en-US" dirty="0" err="1"/>
-              <a:t>jax.jacobian</a:t>
-            </a:r>
-            <a:r>
-              <a:rPr lang="en-US" dirty="0"/>
-              <a:t>(fun, </a:t>
-            </a:r>
-            <a:r>
-              <a:rPr lang="en-US" dirty="0" err="1"/>
-              <a:t>argnums</a:t>
-            </a:r>
-            <a:r>
-              <a:rPr lang="en-US" dirty="0"/>
-              <a:t>=0, </a:t>
-            </a:r>
-            <a:r>
-              <a:rPr lang="en-US" dirty="0" err="1"/>
-              <a:t>has_aux</a:t>
-            </a:r>
-            <a:r>
-              <a:rPr lang="en-US" dirty="0"/>
-              <a:t>=False, holomorphic=False, </a:t>
-            </a:r>
-            <a:r>
-              <a:rPr lang="en-US" dirty="0" err="1"/>
-              <a:t>allow_int</a:t>
-            </a:r>
-            <a:r>
-              <a:rPr lang="en-US" dirty="0"/>
-              <a:t>=False)</a:t>
-            </a:r>
-          </a:p>
-          <a:p>
-            <a:pPr marL="628650" lvl="1" indent="-171450">
-              <a:buFont typeface="Arial" panose="020B0604020202020204" pitchFamily="34" charset="0"/>
-              <a:buChar char="•"/>
-            </a:pPr>
-            <a:r>
-              <a:rPr lang="en-US" sz="1200" b="1" kern="1200" dirty="0">
-                <a:solidFill>
-                  <a:schemeClr val="tx1"/>
-                </a:solidFill>
-                <a:latin typeface="+mn-lt"/>
-                <a:ea typeface="+mn-ea"/>
-                <a:cs typeface="+mn-cs"/>
-              </a:rPr>
-              <a:t>fun</a:t>
-            </a:r>
-            <a:r>
-              <a:rPr lang="en-US" dirty="0"/>
-              <a:t>: The function to differentiate. It can take arrays or scalars as input and return arrays or scalars.</a:t>
-            </a:r>
-          </a:p>
-          <a:p>
-            <a:pPr marL="628650" lvl="1" indent="-171450">
-              <a:buFont typeface="Arial" panose="020B0604020202020204" pitchFamily="34" charset="0"/>
-              <a:buChar char="•"/>
-            </a:pPr>
-            <a:r>
-              <a:rPr lang="en-US" sz="1200" b="1" kern="1200" dirty="0" err="1">
-                <a:solidFill>
-                  <a:schemeClr val="tx1"/>
-                </a:solidFill>
-                <a:latin typeface="+mn-lt"/>
-                <a:ea typeface="+mn-ea"/>
-                <a:cs typeface="+mn-cs"/>
-              </a:rPr>
-              <a:t>argnums</a:t>
-            </a:r>
-            <a:r>
-              <a:rPr lang="en-US" dirty="0"/>
-              <a:t>: Specifies which argument(s) of </a:t>
-            </a:r>
-            <a:r>
-              <a:rPr lang="en-US" sz="1200" kern="1200" dirty="0">
-                <a:solidFill>
-                  <a:schemeClr val="tx1"/>
-                </a:solidFill>
-                <a:latin typeface="+mn-lt"/>
-                <a:ea typeface="+mn-ea"/>
-                <a:cs typeface="+mn-cs"/>
-              </a:rPr>
-              <a:t>fun</a:t>
-            </a:r>
-            <a:r>
-              <a:rPr lang="en-US" dirty="0"/>
-              <a:t> to differentiate with respect to.</a:t>
-            </a:r>
-          </a:p>
-          <a:p>
-            <a:pPr marL="171450" indent="-171450">
-              <a:buFont typeface="Arial" panose="020B0604020202020204" pitchFamily="34" charset="0"/>
-              <a:buChar char="•"/>
-            </a:pPr>
             <a:endParaRPr lang="en-US" dirty="0"/>
           </a:p>
         </p:txBody>
@@ -1537,179 +1239,7 @@
           <a:bodyPr/>
           <a:lstStyle/>
           <a:p>
-            <a:endParaRPr lang="en-US"/>
-          </a:p>
-          <a:p>
-            <a:endParaRPr lang="en-US"/>
-          </a:p>
-          <a:p>
-            <a:r>
-              <a:rPr lang="en-US"/>
-              <a:t>%%</a:t>
-            </a:r>
-          </a:p>
-          <a:p>
-            <a:pPr algn="l"/>
-            <a:r>
-              <a:rPr lang="en-US" b="0" i="0">
-                <a:solidFill>
-                  <a:srgbClr val="202122"/>
-                </a:solidFill>
-                <a:effectLst/>
-                <a:latin typeface="Arial" panose="020B0604020202020204" pitchFamily="34" charset="0"/>
-              </a:rPr>
-              <a:t>In particular, a </a:t>
-            </a:r>
-            <a:r>
-              <a:rPr lang="en-US" b="0" i="0" u="none" strike="noStrike">
-                <a:solidFill>
-                  <a:srgbClr val="202122"/>
-                </a:solidFill>
-                <a:effectLst/>
-                <a:latin typeface="Arial" panose="020B0604020202020204" pitchFamily="34" charset="0"/>
-                <a:hlinkClick r:id="rId3" tooltip="Real-valued function"/>
-              </a:rPr>
-              <a:t>real-valued function</a:t>
-            </a:r>
-            <a:r>
-              <a:rPr lang="en-US" b="0" i="0">
-                <a:solidFill>
-                  <a:srgbClr val="202122"/>
-                </a:solidFill>
-                <a:effectLst/>
-                <a:latin typeface="Arial" panose="020B0604020202020204" pitchFamily="34" charset="0"/>
-              </a:rPr>
-              <a:t> </a:t>
-            </a:r>
-            <a:r>
-              <a:rPr lang="en-US" b="0" i="1">
-                <a:solidFill>
-                  <a:srgbClr val="202122"/>
-                </a:solidFill>
-                <a:effectLst/>
-                <a:latin typeface="Arial" panose="020B0604020202020204" pitchFamily="34" charset="0"/>
-              </a:rPr>
-              <a:t>f</a:t>
-            </a:r>
-            <a:r>
-              <a:rPr lang="en-US" b="0" i="0">
-                <a:solidFill>
-                  <a:srgbClr val="202122"/>
-                </a:solidFill>
-                <a:effectLst/>
-                <a:latin typeface="Arial" panose="020B0604020202020204" pitchFamily="34" charset="0"/>
-              </a:rPr>
-              <a:t> : </a:t>
-            </a:r>
-            <a:r>
-              <a:rPr lang="en-US" b="1" i="0">
-                <a:solidFill>
-                  <a:srgbClr val="202122"/>
-                </a:solidFill>
-                <a:effectLst/>
-                <a:latin typeface="Arial" panose="020B0604020202020204" pitchFamily="34" charset="0"/>
-              </a:rPr>
-              <a:t>R</a:t>
-            </a:r>
-            <a:r>
-              <a:rPr lang="en-US" b="0" i="0">
-                <a:solidFill>
-                  <a:srgbClr val="202122"/>
-                </a:solidFill>
-                <a:effectLst/>
-                <a:latin typeface="Arial" panose="020B0604020202020204" pitchFamily="34" charset="0"/>
-              </a:rPr>
-              <a:t> → </a:t>
-            </a:r>
-            <a:r>
-              <a:rPr lang="en-US" b="1" i="0">
-                <a:solidFill>
-                  <a:srgbClr val="202122"/>
-                </a:solidFill>
-                <a:effectLst/>
-                <a:latin typeface="Arial" panose="020B0604020202020204" pitchFamily="34" charset="0"/>
-              </a:rPr>
-              <a:t>R</a:t>
-            </a:r>
-            <a:r>
-              <a:rPr lang="en-US" b="0" i="0">
-                <a:solidFill>
-                  <a:srgbClr val="202122"/>
-                </a:solidFill>
-                <a:effectLst/>
-                <a:latin typeface="Arial" panose="020B0604020202020204" pitchFamily="34" charset="0"/>
-              </a:rPr>
-              <a:t> is called Lipschitz continuous if there exists a positive real constant K such that, for all real </a:t>
-            </a:r>
-            <a:r>
-              <a:rPr lang="en-US" b="0" i="1">
-                <a:solidFill>
-                  <a:srgbClr val="202122"/>
-                </a:solidFill>
-                <a:effectLst/>
-                <a:latin typeface="Arial" panose="020B0604020202020204" pitchFamily="34" charset="0"/>
-              </a:rPr>
-              <a:t>x</a:t>
-            </a:r>
-            <a:r>
-              <a:rPr lang="en-US" b="0" i="0" baseline="-25000">
-                <a:solidFill>
-                  <a:srgbClr val="202122"/>
-                </a:solidFill>
-                <a:effectLst/>
-                <a:latin typeface="Arial" panose="020B0604020202020204" pitchFamily="34" charset="0"/>
-              </a:rPr>
-              <a:t>1</a:t>
-            </a:r>
-            <a:r>
-              <a:rPr lang="en-US" b="0" i="0">
-                <a:solidFill>
-                  <a:srgbClr val="202122"/>
-                </a:solidFill>
-                <a:effectLst/>
-                <a:latin typeface="Arial" panose="020B0604020202020204" pitchFamily="34" charset="0"/>
-              </a:rPr>
-              <a:t> and </a:t>
-            </a:r>
-            <a:r>
-              <a:rPr lang="en-US" b="0" i="1">
-                <a:solidFill>
-                  <a:srgbClr val="202122"/>
-                </a:solidFill>
-                <a:effectLst/>
-                <a:latin typeface="Arial" panose="020B0604020202020204" pitchFamily="34" charset="0"/>
-              </a:rPr>
-              <a:t>x</a:t>
-            </a:r>
-            <a:r>
-              <a:rPr lang="en-US" b="0" i="0" baseline="-25000">
-                <a:solidFill>
-                  <a:srgbClr val="202122"/>
-                </a:solidFill>
-                <a:effectLst/>
-                <a:latin typeface="Arial" panose="020B0604020202020204" pitchFamily="34" charset="0"/>
-              </a:rPr>
-              <a:t>2</a:t>
-            </a:r>
-            <a:r>
-              <a:rPr lang="en-US" b="0" i="0">
-                <a:solidFill>
-                  <a:srgbClr val="202122"/>
-                </a:solidFill>
-                <a:effectLst/>
-                <a:latin typeface="Arial" panose="020B0604020202020204" pitchFamily="34" charset="0"/>
-              </a:rPr>
-              <a:t>,</a:t>
-            </a:r>
-          </a:p>
-          <a:p>
-            <a:r>
-              <a:rPr lang="en-US">
-                <a:effectLst/>
-              </a:rPr>
-              <a:t>|f(x1)−f(x2)|≤K|x1−x2|.</a:t>
-            </a:r>
-            <a:endParaRPr lang="en-US"/>
+            <a:endParaRPr lang="en-US" dirty="0"/>
           </a:p>
         </p:txBody>
       </p:sp>
@@ -1793,102 +1323,7 @@
           <a:bodyPr/>
           <a:lstStyle/>
           <a:p>
-            <a:endParaRPr lang="en-US"/>
-          </a:p>
-          <a:p>
-            <a:endParaRPr lang="en-US"/>
-          </a:p>
-          <a:p>
-            <a:endParaRPr lang="en-US"/>
-          </a:p>
-          <a:p>
-            <a:r>
-              <a:rPr lang="en-US"/>
-              <a:t>%%</a:t>
-            </a:r>
-          </a:p>
-          <a:p>
-            <a:r>
-              <a:rPr lang="en-US" b="0" i="0">
-                <a:solidFill>
-                  <a:srgbClr val="202122"/>
-                </a:solidFill>
-                <a:effectLst/>
-                <a:latin typeface="Arial" panose="020B0604020202020204" pitchFamily="34" charset="0"/>
-              </a:rPr>
-              <a:t>If f is </a:t>
-            </a:r>
-            <a:r>
-              <a:rPr lang="en-US" b="0" i="0" u="none" strike="noStrike">
-                <a:effectLst/>
-                <a:latin typeface="Arial" panose="020B0604020202020204" pitchFamily="34" charset="0"/>
-                <a:hlinkClick r:id="rId3" tooltip="Riemann integrable"/>
-              </a:rPr>
-              <a:t>Riemann integrable</a:t>
-            </a:r>
-            <a:r>
-              <a:rPr lang="en-US" b="0" i="0">
-                <a:solidFill>
-                  <a:srgbClr val="202122"/>
-                </a:solidFill>
-                <a:effectLst/>
-                <a:latin typeface="Arial" panose="020B0604020202020204" pitchFamily="34" charset="0"/>
-              </a:rPr>
-              <a:t> on [</a:t>
-            </a:r>
-            <a:r>
-              <a:rPr lang="en-US" b="0" i="0" err="1">
-                <a:solidFill>
-                  <a:srgbClr val="202122"/>
-                </a:solidFill>
-                <a:effectLst/>
-                <a:latin typeface="Arial" panose="020B0604020202020204" pitchFamily="34" charset="0"/>
-              </a:rPr>
-              <a:t>a,b</a:t>
-            </a:r>
-            <a:r>
-              <a:rPr lang="en-US" b="0" i="0">
-                <a:solidFill>
-                  <a:srgbClr val="202122"/>
-                </a:solidFill>
-                <a:effectLst/>
-                <a:latin typeface="Arial" panose="020B0604020202020204" pitchFamily="34" charset="0"/>
-              </a:rPr>
-              <a:t>] then</a:t>
-            </a:r>
-          </a:p>
-          <a:p>
-            <a:r>
-              <a:rPr lang="en-US" b="0" i="0">
-                <a:solidFill>
-                  <a:srgbClr val="202122"/>
-                </a:solidFill>
-                <a:effectLst/>
-                <a:latin typeface="Arial" panose="020B0604020202020204" pitchFamily="34" charset="0"/>
-              </a:rPr>
-              <a:t>∫</a:t>
-            </a:r>
-            <a:r>
-              <a:rPr lang="en-US" b="0" i="0" err="1">
-                <a:solidFill>
-                  <a:srgbClr val="202122"/>
-                </a:solidFill>
-                <a:effectLst/>
-                <a:latin typeface="Arial" panose="020B0604020202020204" pitchFamily="34" charset="0"/>
-              </a:rPr>
-              <a:t>abf</a:t>
-            </a:r>
-            <a:r>
-              <a:rPr lang="en-US" b="0" i="0">
-                <a:solidFill>
-                  <a:srgbClr val="202122"/>
-                </a:solidFill>
-                <a:effectLst/>
-                <a:latin typeface="Arial" panose="020B0604020202020204" pitchFamily="34" charset="0"/>
-              </a:rPr>
-              <a:t>(x)dx=F(b)−F(a).</a:t>
-            </a:r>
-            <a:endParaRPr lang="en-US"/>
+            <a:endParaRPr lang="en-US" dirty="0"/>
           </a:p>
         </p:txBody>
       </p:sp>
@@ -1972,7 +1407,7 @@
           <a:bodyPr/>
           <a:lstStyle/>
           <a:p>
-            <a:endParaRPr lang="en-US"/>
+            <a:endParaRPr lang="en-US" dirty="0"/>
           </a:p>
         </p:txBody>
       </p:sp>
@@ -2056,103 +1491,7 @@
           <a:bodyPr/>
           <a:lstStyle/>
           <a:p>
-            <a:pPr algn="l"/>
-            <a:r>
-              <a:rPr lang="en-US" b="1" i="0">
-                <a:solidFill>
-                  <a:srgbClr val="202122"/>
-                </a:solidFill>
-                <a:effectLst/>
-                <a:latin typeface="Arial" panose="020B0604020202020204" pitchFamily="34" charset="0"/>
-              </a:rPr>
-              <a:t>Truncation errors</a:t>
-            </a:r>
-            <a:r>
-              <a:rPr lang="en-US" b="0" i="0">
-                <a:solidFill>
-                  <a:srgbClr val="202122"/>
-                </a:solidFill>
-                <a:effectLst/>
-                <a:latin typeface="Arial" panose="020B0604020202020204" pitchFamily="34" charset="0"/>
-              </a:rPr>
-              <a:t> in </a:t>
-            </a:r>
-            <a:r>
-              <a:rPr lang="en-US" b="0" i="0" u="none" strike="noStrike">
-                <a:solidFill>
-                  <a:srgbClr val="202122"/>
-                </a:solidFill>
-                <a:effectLst/>
-                <a:latin typeface="Arial" panose="020B0604020202020204" pitchFamily="34" charset="0"/>
-                <a:hlinkClick r:id="rId3" tooltip="Numerical integration"/>
-              </a:rPr>
-              <a:t>numerical integration</a:t>
-            </a:r>
-            <a:r>
-              <a:rPr lang="en-US" b="0" i="0">
-                <a:solidFill>
-                  <a:srgbClr val="202122"/>
-                </a:solidFill>
-                <a:effectLst/>
-                <a:latin typeface="Arial" panose="020B0604020202020204" pitchFamily="34" charset="0"/>
-              </a:rPr>
-              <a:t> are of two kinds:</a:t>
-            </a:r>
-          </a:p>
-          <a:p>
-            <a:pPr algn="l">
-              <a:buFont typeface="Arial" panose="020B0604020202020204" pitchFamily="34" charset="0"/>
-              <a:buChar char="•"/>
-            </a:pPr>
-            <a:r>
-              <a:rPr lang="en-US" b="0" i="1">
-                <a:solidFill>
-                  <a:srgbClr val="202122"/>
-                </a:solidFill>
-                <a:effectLst/>
-                <a:latin typeface="Arial" panose="020B0604020202020204" pitchFamily="34" charset="0"/>
-              </a:rPr>
-              <a:t>local truncation errors</a:t>
-            </a:r>
-            <a:r>
-              <a:rPr lang="en-US" b="0" i="0">
-                <a:solidFill>
-                  <a:srgbClr val="202122"/>
-                </a:solidFill>
-                <a:effectLst/>
-                <a:latin typeface="Arial" panose="020B0604020202020204" pitchFamily="34" charset="0"/>
-              </a:rPr>
-              <a:t> – the error caused by one iteration, and</a:t>
-            </a:r>
-          </a:p>
-          <a:p>
-            <a:pPr algn="l">
-              <a:buFont typeface="Arial" panose="020B0604020202020204" pitchFamily="34" charset="0"/>
-              <a:buChar char="•"/>
-            </a:pPr>
-            <a:r>
-              <a:rPr lang="en-US" b="0" i="1">
-                <a:solidFill>
-                  <a:srgbClr val="202122"/>
-                </a:solidFill>
-                <a:effectLst/>
-                <a:latin typeface="Arial" panose="020B0604020202020204" pitchFamily="34" charset="0"/>
-              </a:rPr>
-              <a:t>global truncation errors</a:t>
-            </a:r>
-            <a:r>
-              <a:rPr lang="en-US" b="0" i="0">
-                <a:solidFill>
-                  <a:srgbClr val="202122"/>
-                </a:solidFill>
-                <a:effectLst/>
-                <a:latin typeface="Arial" panose="020B0604020202020204" pitchFamily="34" charset="0"/>
-              </a:rPr>
-              <a:t> – the cumulative error caused by many iterations.</a:t>
-            </a:r>
-          </a:p>
-          <a:p>
-            <a:endParaRPr lang="en-US"/>
+            <a:endParaRPr lang="en-US" dirty="0"/>
           </a:p>
         </p:txBody>
       </p:sp>
@@ -2236,10 +1575,7 @@
           <a:bodyPr/>
           <a:lstStyle/>
           <a:p>
-            <a:r>
-              <a:rPr lang="en-US"/>
-              <a:t>Change Dt, e.g., 0.5, 1, 0.1, 0.01 </a:t>
-            </a:r>
+            <a:endParaRPr lang="en-US" dirty="0"/>
           </a:p>
         </p:txBody>
       </p:sp>
@@ -2323,7 +1659,7 @@
           <a:bodyPr/>
           <a:lstStyle/>
           <a:p>
-            <a:endParaRPr lang="en-US"/>
+            <a:endParaRPr lang="en-US" dirty="0"/>
           </a:p>
         </p:txBody>
       </p:sp>
@@ -2407,351 +1743,7 @@
           <a:bodyPr/>
           <a:lstStyle/>
           <a:p>
-            <a:r>
-              <a:rPr lang="en-US"/>
-              <a:t>Explain controller</a:t>
-            </a:r>
-          </a:p>
-          <a:p>
-            <a:endParaRPr lang="en-US"/>
-          </a:p>
-          <a:p>
-            <a:r>
-              <a:rPr lang="en-US"/>
-              <a:t>(</a:t>
-            </a:r>
-            <a:r>
-              <a:rPr lang="en-US" b="0" i="0">
-                <a:solidFill>
-                  <a:srgbClr val="202122"/>
-                </a:solidFill>
-                <a:effectLst/>
-                <a:latin typeface="Arial" panose="020B0604020202020204" pitchFamily="34" charset="0"/>
-              </a:rPr>
-              <a:t>The ordinary single-argument </a:t>
-            </a:r>
-            <a:r>
-              <a:rPr lang="en-US" b="0" i="0" u="none" strike="noStrike">
-                <a:solidFill>
-                  <a:srgbClr val="3366CC"/>
-                </a:solidFill>
-                <a:effectLst/>
-                <a:latin typeface="Arial" panose="020B0604020202020204" pitchFamily="34" charset="0"/>
-                <a:hlinkClick r:id="rId3" tooltip="Arctangent"/>
-              </a:rPr>
-              <a:t>arctangent</a:t>
-            </a:r>
-            <a:r>
-              <a:rPr lang="en-US" b="0" i="0">
-                <a:solidFill>
-                  <a:srgbClr val="202122"/>
-                </a:solidFill>
-                <a:effectLst/>
-                <a:latin typeface="Arial" panose="020B0604020202020204" pitchFamily="34" charset="0"/>
-              </a:rPr>
-              <a:t> function only returns angle measures in the interval (−\pi/2,+\pi2),</a:t>
-            </a:r>
-            <a:r>
-              <a:rPr lang="en-US"/>
-              <a:t>)</a:t>
-            </a:r>
-          </a:p>
-          <a:p>
-            <a:r>
-              <a:rPr lang="en-US" b="0" i="0" u="sng">
-                <a:solidFill>
-                  <a:srgbClr val="3366CC"/>
-                </a:solidFill>
-                <a:effectLst/>
-                <a:latin typeface="Arial" panose="020B0604020202020204" pitchFamily="34" charset="0"/>
-                <a:hlinkClick r:id="rId4"/>
-              </a:rPr>
-              <a:t>Diametrically opposite</a:t>
-            </a:r>
-            <a:r>
-              <a:rPr lang="en-US" b="0" i="0">
-                <a:solidFill>
-                  <a:srgbClr val="202122"/>
-                </a:solidFill>
-                <a:effectLst/>
-                <a:latin typeface="Arial" panose="020B0604020202020204" pitchFamily="34" charset="0"/>
-              </a:rPr>
-              <a:t> angle measures have the same tangent because y/x=(−y)/(−x), so the tangent y/x is not in itself sufficient to uniquely specify an angle.</a:t>
-            </a:r>
-            <a:endParaRPr lang="en-US"/>
-          </a:p>
-          <a:p>
-            <a:r>
-              <a:rPr lang="en-US" b="1" i="0">
-                <a:solidFill>
-                  <a:srgbClr val="202122"/>
-                </a:solidFill>
-                <a:effectLst/>
-                <a:latin typeface="Arial" panose="020B0604020202020204" pitchFamily="34" charset="0"/>
-              </a:rPr>
-              <a:t>atan2</a:t>
-            </a:r>
-            <a:r>
-              <a:rPr lang="en-US" b="0" i="0">
-                <a:solidFill>
-                  <a:srgbClr val="202122"/>
-                </a:solidFill>
-                <a:effectLst/>
-                <a:latin typeface="Arial" panose="020B0604020202020204" pitchFamily="34" charset="0"/>
-              </a:rPr>
-              <a:t> is the 2-</a:t>
-            </a:r>
-            <a:r>
-              <a:rPr lang="en-US" b="0" i="0" u="none" strike="noStrike">
-                <a:solidFill>
-                  <a:srgbClr val="3366CC"/>
-                </a:solidFill>
-                <a:effectLst/>
-                <a:latin typeface="Arial" panose="020B0604020202020204" pitchFamily="34" charset="0"/>
-                <a:hlinkClick r:id="rId5" tooltip="Argument of a function"/>
-              </a:rPr>
-              <a:t>argument</a:t>
-            </a:r>
-            <a:r>
-              <a:rPr lang="en-US" b="0" i="0">
-                <a:solidFill>
-                  <a:srgbClr val="202122"/>
-                </a:solidFill>
-                <a:effectLst/>
-                <a:latin typeface="Arial" panose="020B0604020202020204" pitchFamily="34" charset="0"/>
-              </a:rPr>
-              <a:t> </a:t>
-            </a:r>
-            <a:r>
-              <a:rPr lang="en-US" b="0" i="0" u="none" strike="noStrike">
-                <a:solidFill>
-                  <a:srgbClr val="3366CC"/>
-                </a:solidFill>
-                <a:effectLst/>
-                <a:latin typeface="Arial" panose="020B0604020202020204" pitchFamily="34" charset="0"/>
-                <a:hlinkClick r:id="rId3" tooltip="Arctangent"/>
-              </a:rPr>
-              <a:t>arctangent</a:t>
-            </a:r>
-            <a:r>
-              <a:rPr lang="en-US" b="0" i="0">
-                <a:solidFill>
-                  <a:srgbClr val="202122"/>
-                </a:solidFill>
-                <a:effectLst/>
-                <a:latin typeface="Arial" panose="020B0604020202020204" pitchFamily="34" charset="0"/>
-              </a:rPr>
-              <a:t>.</a:t>
-            </a:r>
-          </a:p>
-          <a:p>
-            <a:r>
-              <a:rPr lang="en-US" b="0" i="0">
-                <a:solidFill>
-                  <a:srgbClr val="202122"/>
-                </a:solidFill>
-                <a:effectLst/>
-                <a:latin typeface="Arial" panose="020B0604020202020204" pitchFamily="34" charset="0"/>
-              </a:rPr>
-              <a:t>By definition, theta=atan2⁡(</a:t>
-            </a:r>
-            <a:r>
-              <a:rPr lang="en-US" b="0" i="0" err="1">
-                <a:solidFill>
-                  <a:srgbClr val="202122"/>
-                </a:solidFill>
-                <a:effectLst/>
-                <a:latin typeface="Arial" panose="020B0604020202020204" pitchFamily="34" charset="0"/>
-              </a:rPr>
-              <a:t>y,x</a:t>
-            </a:r>
-            <a:r>
-              <a:rPr lang="en-US" b="0" i="0">
-                <a:solidFill>
-                  <a:srgbClr val="202122"/>
-                </a:solidFill>
-                <a:effectLst/>
-                <a:latin typeface="Arial" panose="020B0604020202020204" pitchFamily="34" charset="0"/>
-              </a:rPr>
-              <a:t>) is the </a:t>
-            </a:r>
-            <a:r>
-              <a:rPr lang="en-US" b="0" i="0" u="none" strike="noStrike">
-                <a:solidFill>
-                  <a:srgbClr val="3366CC"/>
-                </a:solidFill>
-                <a:effectLst/>
-                <a:latin typeface="Arial" panose="020B0604020202020204" pitchFamily="34" charset="0"/>
-                <a:hlinkClick r:id="rId6" tooltip="Angle measure"/>
-              </a:rPr>
-              <a:t>angle measure</a:t>
-            </a:r>
-            <a:r>
-              <a:rPr lang="en-US" b="0" i="0">
-                <a:solidFill>
-                  <a:srgbClr val="202122"/>
-                </a:solidFill>
-                <a:effectLst/>
-                <a:latin typeface="Arial" panose="020B0604020202020204" pitchFamily="34" charset="0"/>
-              </a:rPr>
-              <a:t> (in </a:t>
-            </a:r>
-            <a:r>
-              <a:rPr lang="en-US" b="0" i="0" u="none" strike="noStrike">
-                <a:solidFill>
-                  <a:srgbClr val="3366CC"/>
-                </a:solidFill>
-                <a:effectLst/>
-                <a:latin typeface="Arial" panose="020B0604020202020204" pitchFamily="34" charset="0"/>
-                <a:hlinkClick r:id="rId7" tooltip="Radian"/>
-              </a:rPr>
-              <a:t>radians</a:t>
-            </a:r>
-            <a:r>
-              <a:rPr lang="en-US" b="0" i="0">
-                <a:solidFill>
-                  <a:srgbClr val="202122"/>
-                </a:solidFill>
-                <a:effectLst/>
-                <a:latin typeface="Arial" panose="020B0604020202020204" pitchFamily="34" charset="0"/>
-              </a:rPr>
-              <a:t>, with −pi&lt;\</a:t>
-            </a:r>
-            <a:r>
-              <a:rPr lang="en-US" b="0" i="0" err="1">
-                <a:solidFill>
-                  <a:srgbClr val="202122"/>
-                </a:solidFill>
-                <a:effectLst/>
-                <a:latin typeface="Arial" panose="020B0604020202020204" pitchFamily="34" charset="0"/>
-              </a:rPr>
-              <a:t>theat</a:t>
-            </a:r>
-            <a:r>
-              <a:rPr lang="en-US" b="0" i="0">
-                <a:solidFill>
-                  <a:srgbClr val="202122"/>
-                </a:solidFill>
-                <a:effectLst/>
-                <a:latin typeface="Arial" panose="020B0604020202020204" pitchFamily="34" charset="0"/>
-              </a:rPr>
-              <a:t>≤\pi) between the positive </a:t>
-            </a:r>
-            <a:r>
-              <a:rPr lang="en-US" b="0" i="0" u="none" strike="noStrike">
-                <a:solidFill>
-                  <a:srgbClr val="3366CC"/>
-                </a:solidFill>
-                <a:effectLst/>
-                <a:latin typeface="Arial" panose="020B0604020202020204" pitchFamily="34" charset="0"/>
-              </a:rPr>
-              <a:t>x</a:t>
-            </a:r>
-            <a:r>
-              <a:rPr lang="en-US" b="0" i="0" u="none" strike="noStrike">
-                <a:solidFill>
-                  <a:srgbClr val="3366CC"/>
-                </a:solidFill>
-                <a:effectLst/>
-                <a:latin typeface="Arial" panose="020B0604020202020204" pitchFamily="34" charset="0"/>
-                <a:hlinkClick r:id="rId8" tooltip="Cartesian coordinate system"/>
-              </a:rPr>
-              <a:t>-axis</a:t>
-            </a:r>
-            <a:r>
-              <a:rPr lang="en-US" b="0" i="0">
-                <a:solidFill>
-                  <a:srgbClr val="202122"/>
-                </a:solidFill>
-                <a:effectLst/>
-                <a:latin typeface="Arial" panose="020B0604020202020204" pitchFamily="34" charset="0"/>
-              </a:rPr>
-              <a:t> and the </a:t>
-            </a:r>
-            <a:r>
-              <a:rPr lang="en-US" b="0" i="0" u="none" strike="noStrike">
-                <a:solidFill>
-                  <a:srgbClr val="3366CC"/>
-                </a:solidFill>
-                <a:effectLst/>
-                <a:latin typeface="Arial" panose="020B0604020202020204" pitchFamily="34" charset="0"/>
-                <a:hlinkClick r:id="rId9" tooltip="Ray (geometry)"/>
-              </a:rPr>
-              <a:t>ray</a:t>
-            </a:r>
-            <a:r>
-              <a:rPr lang="en-US" b="0" i="0">
-                <a:solidFill>
-                  <a:srgbClr val="202122"/>
-                </a:solidFill>
-                <a:effectLst/>
-                <a:latin typeface="Arial" panose="020B0604020202020204" pitchFamily="34" charset="0"/>
-              </a:rPr>
-              <a:t> from the </a:t>
-            </a:r>
-            <a:r>
-              <a:rPr lang="en-US" b="0" i="0" u="none" strike="noStrike">
-                <a:solidFill>
-                  <a:srgbClr val="3366CC"/>
-                </a:solidFill>
-                <a:effectLst/>
-                <a:latin typeface="Arial" panose="020B0604020202020204" pitchFamily="34" charset="0"/>
-                <a:hlinkClick r:id="rId10" tooltip="Origin (mathematics)"/>
-              </a:rPr>
-              <a:t>origin</a:t>
-            </a:r>
-            <a:r>
-              <a:rPr lang="en-US" b="0" i="0">
-                <a:solidFill>
-                  <a:srgbClr val="202122"/>
-                </a:solidFill>
-                <a:effectLst/>
-                <a:latin typeface="Arial" panose="020B0604020202020204" pitchFamily="34" charset="0"/>
-              </a:rPr>
-              <a:t> to the point (</a:t>
-            </a:r>
-            <a:r>
-              <a:rPr lang="en-US" b="0" i="0" err="1">
-                <a:solidFill>
-                  <a:srgbClr val="202122"/>
-                </a:solidFill>
-                <a:effectLst/>
-                <a:latin typeface="Arial" panose="020B0604020202020204" pitchFamily="34" charset="0"/>
-              </a:rPr>
-              <a:t>x,y</a:t>
-            </a:r>
-            <a:r>
-              <a:rPr lang="en-US" b="0" i="0">
-                <a:solidFill>
-                  <a:srgbClr val="202122"/>
-                </a:solidFill>
-                <a:effectLst/>
-                <a:latin typeface="Arial" panose="020B0604020202020204" pitchFamily="34" charset="0"/>
-              </a:rPr>
-              <a:t>) in the </a:t>
-            </a:r>
-            <a:r>
-              <a:rPr lang="en-US" b="0" i="0" u="none" strike="noStrike">
-                <a:solidFill>
-                  <a:srgbClr val="3366CC"/>
-                </a:solidFill>
-                <a:effectLst/>
-                <a:latin typeface="Arial" panose="020B0604020202020204" pitchFamily="34" charset="0"/>
-                <a:hlinkClick r:id="rId8" tooltip="Cartesian coordinate system"/>
-              </a:rPr>
-              <a:t>Cartesian plane</a:t>
-            </a:r>
-            <a:r>
-              <a:rPr lang="en-US" b="0" i="0">
-                <a:solidFill>
-                  <a:srgbClr val="202122"/>
-                </a:solidFill>
-                <a:effectLst/>
-                <a:latin typeface="Arial" panose="020B0604020202020204" pitchFamily="34" charset="0"/>
-              </a:rPr>
-              <a:t>.</a:t>
-            </a:r>
-            <a:endParaRPr lang="en-US"/>
+            <a:endParaRPr lang="en-US" dirty="0"/>
           </a:p>
         </p:txBody>
       </p:sp>
@@ -2920,7 +1912,7 @@
           <a:p>
             <a:fld id="{3D76FB1B-797C-B846-8D40-2A5711AA3FE9}" type="datetime1">
               <a:rPr lang="en-US" smtClean="0"/>
-              <a:t>12/20/2025</a:t>
+              <a:t>8/13/26</a:t>
             </a:fld>
             <a:endParaRPr lang="en-US"/>
           </a:p>
@@ -3138,7 +2130,7 @@
           <a:p>
             <a:fld id="{4D10604C-D23D-E148-9492-84D4EB13D3B6}" type="datetime1">
               <a:rPr lang="en-US" smtClean="0"/>
-              <a:t>12/20/2025</a:t>
+              <a:t>8/13/26</a:t>
             </a:fld>
             <a:endParaRPr lang="en-US"/>
           </a:p>
@@ -3320,7 +2312,7 @@
           <a:p>
             <a:fld id="{C88538F9-BB56-274C-9CB0-1F4E69450CFE}" type="datetime1">
               <a:rPr lang="en-US" smtClean="0"/>
-              <a:t>12/20/2025</a:t>
+              <a:t>8/13/26</a:t>
             </a:fld>
             <a:endParaRPr lang="en-US"/>
           </a:p>
@@ -3497,7 +2489,7 @@
           <a:p>
             <a:fld id="{5BD7217A-6C1A-E942-8546-0EEBFD2E3886}" type="datetime1">
               <a:rPr lang="en-US" smtClean="0"/>
-              <a:t>12/20/2025</a:t>
+              <a:t>8/13/26</a:t>
             </a:fld>
             <a:endParaRPr lang="en-US"/>
           </a:p>
@@ -3802,7 +2794,7 @@
           <a:p>
             <a:fld id="{9C261396-1C19-FF4D-A115-25C4945E757E}" type="datetime1">
               <a:rPr lang="en-US" smtClean="0"/>
-              <a:t>12/20/2025</a:t>
+              <a:t>8/13/26</a:t>
             </a:fld>
             <a:endParaRPr lang="en-US"/>
           </a:p>
@@ -4035,7 +3027,7 @@
           <a:p>
             <a:fld id="{E6AC0105-FE19-944C-9853-0C49D697009D}" type="datetime1">
               <a:rPr lang="en-US" smtClean="0"/>
-              <a:t>12/20/2025</a:t>
+              <a:t>8/13/26</a:t>
             </a:fld>
             <a:endParaRPr lang="en-US"/>
           </a:p>
@@ -4403,7 +3395,7 @@
           <a:p>
             <a:fld id="{59F7E71C-0A24-4F4B-B1B0-F58962A357D2}" type="datetime1">
               <a:rPr lang="en-US" smtClean="0"/>
-              <a:t>12/20/2025</a:t>
+              <a:t>8/13/26</a:t>
             </a:fld>
             <a:endParaRPr lang="en-US"/>
           </a:p>
@@ -4524,7 +3516,7 @@
           <a:p>
             <a:fld id="{8BBE58D8-195D-2B45-B37E-4B59D9D8D3AE}" type="datetime1">
               <a:rPr lang="en-US" smtClean="0"/>
-              <a:t>12/20/2025</a:t>
+              <a:t>8/13/26</a:t>
             </a:fld>
             <a:endParaRPr lang="en-US"/>
           </a:p>
@@ -4623,7 +3615,7 @@
           <a:p>
             <a:fld id="{F409BF27-B54B-1B42-9DE9-641A59F70F6D}" type="datetime1">
               <a:rPr lang="en-US" smtClean="0"/>
-              <a:t>12/20/2025</a:t>
+              <a:t>8/13/26</a:t>
             </a:fld>
             <a:endParaRPr lang="en-US"/>
           </a:p>
@@ -4902,7 +3894,7 @@
           <a:p>
             <a:fld id="{24A198CB-DA2D-A948-AA64-57AF44B50190}" type="datetime1">
               <a:rPr lang="en-US" smtClean="0"/>
-              <a:t>12/20/2025</a:t>
+              <a:t>8/13/26</a:t>
             </a:fld>
             <a:endParaRPr lang="en-US"/>
           </a:p>
@@ -5158,7 +4150,7 @@
           <a:p>
             <a:fld id="{4DF29BE3-C1E6-1444-BDE5-D7F478283520}" type="datetime1">
               <a:rPr lang="en-US" smtClean="0"/>
-              <a:t>12/20/2025</a:t>
+              <a:t>8/13/26</a:t>
             </a:fld>
             <a:endParaRPr lang="en-US"/>
           </a:p>
@@ -5373,7 +4365,7 @@
           <a:p>
             <a:fld id="{50D6F93F-C8A2-784F-88DB-D3A54134357F}" type="datetime1">
               <a:rPr lang="en-US" smtClean="0"/>
-              <a:t>12/20/2025</a:t>
+              <a:t>8/13/26</a:t>
             </a:fld>
             <a:endParaRPr lang="en-US"/>
           </a:p>
@@ -6648,7 +5640,7 @@
           <a:p>
             <a:fld id="{1F56FDD1-86FE-3849-83E5-F6862296CFDA}" type="datetime1">
               <a:rPr lang="en-US" smtClean="0"/>
-              <a:t>12/20/2025</a:t>
+              <a:t>8/13/26</a:t>
             </a:fld>
             <a:endParaRPr lang="en-US"/>
           </a:p>
@@ -7411,7 +6403,7 @@
           <a:p>
             <a:fld id="{51EC2A26-7B6A-6946-89F8-35FF280698E6}" type="datetime1">
               <a:rPr lang="en-US" smtClean="0"/>
-              <a:t>12/20/2025</a:t>
+              <a:t>8/13/26</a:t>
             </a:fld>
             <a:endParaRPr lang="en-US"/>
           </a:p>
@@ -8107,7 +7099,7 @@
           <a:p>
             <a:fld id="{40865029-3893-5741-87EE-3FE8E1607127}" type="datetime1">
               <a:rPr lang="en-US" smtClean="0"/>
-              <a:t>12/20/2025</a:t>
+              <a:t>8/13/26</a:t>
             </a:fld>
             <a:endParaRPr lang="en-US"/>
           </a:p>
@@ -8396,9 +7388,6 @@
                         </m:ctrlPr>
                       </m:boxPr>
                       <m:e>
-                        <m:argPr>
-                          <m:argSz m:val="-1"/>
-                        </m:argPr>
                         <m:f>
                           <m:fPr>
                             <m:ctrlPr>
@@ -8497,9 +7486,6 @@
                         </m:ctrlPr>
                       </m:boxPr>
                       <m:e>
-                        <m:argPr>
-                          <m:argSz m:val="-1"/>
-                        </m:argPr>
                         <m:f>
                           <m:fPr>
                             <m:ctrlPr>
@@ -8536,7 +7522,7 @@
                         <m:limLoc m:val="subSup"/>
                         <m:supHide m:val="on"/>
                         <m:ctrlPr>
-                          <a:rPr lang="en-US" sz="2400" i="1" smtClean="0">
+                          <a:rPr lang="en-US" sz="2400" b="0" i="1" smtClean="0">
                             <a:latin typeface="Cambria Math" panose="02040503050406030204" pitchFamily="18" charset="0"/>
                             <a:ea typeface="Source Sans Pro" panose="020B0503030403020204" pitchFamily="34" charset="0"/>
                           </a:rPr>
@@ -8559,7 +7545,7 @@
                         <m:sSubSup>
                           <m:sSubSupPr>
                             <m:ctrlPr>
-                              <a:rPr lang="en-US" sz="2400" i="1" smtClean="0">
+                              <a:rPr lang="en-US" sz="2400" b="0" i="1" smtClean="0">
                                 <a:latin typeface="Cambria Math" panose="02040503050406030204" pitchFamily="18" charset="0"/>
                                 <a:ea typeface="Source Sans Pro" panose="020B0503030403020204" pitchFamily="34" charset="0"/>
                               </a:rPr>
@@ -8813,7 +7799,7 @@
           <a:p>
             <a:fld id="{97234D00-FD2C-5D4D-A33C-9ED9AAB3B391}" type="datetime1">
               <a:rPr lang="en-US" smtClean="0"/>
-              <a:t>12/20/2025</a:t>
+              <a:t>8/13/26</a:t>
             </a:fld>
             <a:endParaRPr lang="en-US"/>
           </a:p>
@@ -9159,7 +8145,7 @@
                     <m:d>
                       <m:dPr>
                         <m:ctrlPr>
-                          <a:rPr lang="en-US" sz="2400" b="0" i="1" smtClean="0">
+                          <a:rPr lang="en-US" sz="2400" i="1" smtClean="0">
                             <a:latin typeface="Cambria Math" panose="02040503050406030204" pitchFamily="18" charset="0"/>
                             <a:ea typeface="Source Sans Pro" panose="020B0503030403020204" pitchFamily="34" charset="0"/>
                           </a:rPr>
@@ -9170,7 +8156,7 @@
                           <m:accPr>
                             <m:chr m:val="̅"/>
                             <m:ctrlPr>
-                              <a:rPr lang="en-US" sz="2400" i="1" smtClean="0">
+                              <a:rPr lang="en-US" sz="2400" b="0" i="1" smtClean="0">
                                 <a:latin typeface="Cambria Math" panose="02040503050406030204" pitchFamily="18" charset="0"/>
                                 <a:ea typeface="Source Sans Pro" panose="020B0503030403020204" pitchFamily="34" charset="0"/>
                               </a:rPr>
@@ -9350,7 +8336,7 @@
                                 <m:accPr>
                                   <m:chr m:val="̅"/>
                                   <m:ctrlPr>
-                                    <a:rPr lang="en-US" sz="2400" b="0" i="1" smtClean="0">
+                                    <a:rPr lang="en-US" sz="2400" i="1">
                                       <a:latin typeface="Cambria Math" panose="02040503050406030204" pitchFamily="18" charset="0"/>
                                       <a:ea typeface="Source Sans Pro" panose="020B0503030403020204" pitchFamily="34" charset="0"/>
                                     </a:rPr>
@@ -9369,7 +8355,7 @@
                               <m:func>
                                 <m:funcPr>
                                   <m:ctrlPr>
-                                    <a:rPr lang="en-US" sz="2400" b="0" i="1" smtClean="0">
+                                    <a:rPr lang="en-US" sz="2400" b="0" i="0" smtClean="0">
                                       <a:latin typeface="Cambria Math" panose="02040503050406030204" pitchFamily="18" charset="0"/>
                                       <a:ea typeface="Source Sans Pro" panose="020B0503030403020204" pitchFamily="34" charset="0"/>
                                     </a:rPr>
@@ -9394,7 +8380,7 @@
                                       <m:ctrlPr>
                                         <a:rPr lang="en-US" sz="2400" b="0" i="1" smtClean="0">
                                           <a:latin typeface="Cambria Math" panose="02040503050406030204" pitchFamily="18" charset="0"/>
-                                          <a:ea typeface="Source Sans Pro" panose="020B0503030403020204" pitchFamily="34" charset="0"/>
+                                          <a:ea typeface="Cambria Math" panose="02040503050406030204" pitchFamily="18" charset="0"/>
                                         </a:rPr>
                                       </m:ctrlPr>
                                     </m:accPr>
@@ -9455,7 +8441,7 @@
                               <m:func>
                                 <m:funcPr>
                                   <m:ctrlPr>
-                                    <a:rPr lang="en-US" sz="2400" i="1" smtClean="0">
+                                    <a:rPr lang="en-US" sz="2400" i="0" smtClean="0">
                                       <a:latin typeface="Cambria Math" panose="02040503050406030204" pitchFamily="18" charset="0"/>
                                       <a:ea typeface="Source Sans Pro" panose="020B0503030403020204" pitchFamily="34" charset="0"/>
                                     </a:rPr>
@@ -9480,7 +8466,7 @@
                                       <m:ctrlPr>
                                         <a:rPr lang="en-US" sz="2400" i="1">
                                           <a:latin typeface="Cambria Math" panose="02040503050406030204" pitchFamily="18" charset="0"/>
-                                          <a:ea typeface="Source Sans Pro" panose="020B0503030403020204" pitchFamily="34" charset="0"/>
+                                          <a:ea typeface="Cambria Math" panose="02040503050406030204" pitchFamily="18" charset="0"/>
                                         </a:rPr>
                                       </m:ctrlPr>
                                     </m:accPr>
@@ -9624,7 +8610,7 @@
                               <m:func>
                                 <m:funcPr>
                                   <m:ctrlPr>
-                                    <a:rPr lang="en-US" sz="2400" i="1">
+                                    <a:rPr lang="en-US" sz="2400">
                                       <a:latin typeface="Cambria Math" panose="02040503050406030204" pitchFamily="18" charset="0"/>
                                       <a:ea typeface="Source Sans Pro" panose="020B0503030403020204" pitchFamily="34" charset="0"/>
                                     </a:rPr>
@@ -9649,7 +8635,7 @@
                                       <m:ctrlPr>
                                         <a:rPr lang="en-US" sz="2400" i="1">
                                           <a:latin typeface="Cambria Math" panose="02040503050406030204" pitchFamily="18" charset="0"/>
-                                          <a:ea typeface="Source Sans Pro" panose="020B0503030403020204" pitchFamily="34" charset="0"/>
+                                          <a:ea typeface="Cambria Math" panose="02040503050406030204" pitchFamily="18" charset="0"/>
                                         </a:rPr>
                                       </m:ctrlPr>
                                     </m:accPr>
@@ -9681,7 +8667,7 @@
                               <m:func>
                                 <m:funcPr>
                                   <m:ctrlPr>
-                                    <a:rPr lang="en-US" sz="2400" i="1">
+                                    <a:rPr lang="en-US" sz="2400">
                                       <a:latin typeface="Cambria Math" panose="02040503050406030204" pitchFamily="18" charset="0"/>
                                       <a:ea typeface="Source Sans Pro" panose="020B0503030403020204" pitchFamily="34" charset="0"/>
                                     </a:rPr>
@@ -9706,7 +8692,7 @@
                                       <m:ctrlPr>
                                         <a:rPr lang="en-US" sz="2400" i="1">
                                           <a:latin typeface="Cambria Math" panose="02040503050406030204" pitchFamily="18" charset="0"/>
-                                          <a:ea typeface="Source Sans Pro" panose="020B0503030403020204" pitchFamily="34" charset="0"/>
+                                          <a:ea typeface="Cambria Math" panose="02040503050406030204" pitchFamily="18" charset="0"/>
                                         </a:rPr>
                                       </m:ctrlPr>
                                     </m:accPr>
@@ -10461,7 +9447,7 @@
           <a:p>
             <a:fld id="{51371515-2A8E-A141-ACFE-F6DB01B31B16}" type="datetime1">
               <a:rPr lang="en-US" smtClean="0"/>
-              <a:t>12/20/2025</a:t>
+              <a:t>8/13/26</a:t>
             </a:fld>
             <a:endParaRPr lang="en-US"/>
           </a:p>
@@ -10600,7 +9586,7 @@
           <a:p>
             <a:fld id="{AB037262-014B-2048-84D6-E75439470112}" type="datetime1">
               <a:rPr lang="en-US" smtClean="0"/>
-              <a:t>12/20/2025</a:t>
+              <a:t>8/13/26</a:t>
             </a:fld>
             <a:endParaRPr lang="en-US"/>
           </a:p>
@@ -10821,7 +9807,7 @@
           <a:p>
             <a:fld id="{A558A9F6-D5E6-2845-9990-457223861935}" type="datetime1">
               <a:rPr lang="en-US" smtClean="0"/>
-              <a:t>12/20/2025</a:t>
+              <a:t>8/13/26</a:t>
             </a:fld>
             <a:endParaRPr lang="en-US"/>
           </a:p>
@@ -11008,7 +9994,7 @@
           <a:p>
             <a:fld id="{A558A9F6-D5E6-2845-9990-457223861935}" type="datetime1">
               <a:rPr lang="en-US" smtClean="0"/>
-              <a:t>12/20/2025</a:t>
+              <a:t>8/13/26</a:t>
             </a:fld>
             <a:endParaRPr lang="en-US"/>
           </a:p>
@@ -11280,7 +10266,7 @@
           <a:p>
             <a:fld id="{DD30A922-13CA-CD4F-8AA9-1C6445E0CC77}" type="datetime1">
               <a:rPr lang="en-US" smtClean="0"/>
-              <a:t>12/20/2025</a:t>
+              <a:t>8/13/26</a:t>
             </a:fld>
             <a:endParaRPr lang="en-US"/>
           </a:p>
@@ -11500,7 +10486,7 @@
                       <m:accPr>
                         <m:chr m:val="̇"/>
                         <m:ctrlPr>
-                          <a:rPr lang="en-US" sz="2400" i="1" smtClean="0">
+                          <a:rPr lang="en-US" sz="2400" b="0" i="1" smtClean="0">
                             <a:latin typeface="Cambria Math" panose="02040503050406030204" pitchFamily="18" charset="0"/>
                             <a:ea typeface="Source Sans Pro" panose="020B0503030403020204" pitchFamily="34" charset="0"/>
                           </a:rPr>
@@ -11547,7 +10533,7 @@
                     <m:d>
                       <m:dPr>
                         <m:ctrlPr>
-                          <a:rPr lang="en-US" sz="2400" i="1">
+                          <a:rPr lang="en-US" sz="2400" b="0" i="1" smtClean="0">
                             <a:latin typeface="Cambria Math" panose="02040503050406030204" pitchFamily="18" charset="0"/>
                             <a:ea typeface="Source Sans Pro" panose="020B0503030403020204" pitchFamily="34" charset="0"/>
                           </a:rPr>
@@ -12365,7 +11351,7 @@
           <a:p>
             <a:fld id="{8421BEFC-ACFE-2742-9C67-2050E96DCB4A}" type="datetime1">
               <a:rPr lang="en-US" smtClean="0"/>
-              <a:t>12/20/2025</a:t>
+              <a:t>8/13/26</a:t>
             </a:fld>
             <a:endParaRPr lang="en-US"/>
           </a:p>
@@ -12816,7 +11802,7 @@
                                 <m:ctrlPr>
                                   <a:rPr lang="en-US" sz="2400" b="0" i="1" smtClean="0">
                                     <a:latin typeface="Cambria Math" panose="02040503050406030204" pitchFamily="18" charset="0"/>
-                                    <a:ea typeface="Source Sans Pro" panose="020B0503030403020204" pitchFamily="34" charset="0"/>
+                                    <a:ea typeface="Cambria Math" panose="02040503050406030204" pitchFamily="18" charset="0"/>
                                   </a:rPr>
                                 </m:ctrlPr>
                               </m:dPr>
@@ -13020,7 +12006,7 @@
                             <m:sSub>
                               <m:sSubPr>
                                 <m:ctrlPr>
-                                  <a:rPr lang="en-US" sz="2400" i="1" smtClean="0">
+                                  <a:rPr lang="en-US" sz="2400" b="0" i="1" smtClean="0">
                                     <a:latin typeface="Cambria Math" panose="02040503050406030204" pitchFamily="18" charset="0"/>
                                     <a:ea typeface="Cambria Math" panose="02040503050406030204" pitchFamily="18" charset="0"/>
                                   </a:rPr>
@@ -13083,7 +12069,7 @@
                                     <m:ctrlPr>
                                       <a:rPr lang="en-US" sz="2400" i="1">
                                         <a:latin typeface="Cambria Math" panose="02040503050406030204" pitchFamily="18" charset="0"/>
-                                        <a:ea typeface="Source Sans Pro" panose="020B0503030403020204" pitchFamily="34" charset="0"/>
+                                        <a:ea typeface="Cambria Math" panose="02040503050406030204" pitchFamily="18" charset="0"/>
                                       </a:rPr>
                                     </m:ctrlPr>
                                   </m:dPr>
@@ -13158,7 +12144,7 @@
                     <m:sSub>
                       <m:sSubPr>
                         <m:ctrlPr>
-                          <a:rPr lang="en-US" sz="2400" i="1" smtClean="0">
+                          <a:rPr lang="en-US" sz="2400" b="0" i="1" smtClean="0">
                             <a:latin typeface="Cambria Math" panose="02040503050406030204" pitchFamily="18" charset="0"/>
                             <a:ea typeface="Source Sans Pro" panose="020B0503030403020204" pitchFamily="34" charset="0"/>
                           </a:rPr>
@@ -13479,7 +12465,7 @@
                     <m:d>
                       <m:dPr>
                         <m:ctrlPr>
-                          <a:rPr lang="en-US" sz="2400" i="1">
+                          <a:rPr lang="en-US" sz="2400" b="0" i="1" smtClean="0">
                             <a:latin typeface="Cambria Math" panose="02040503050406030204" pitchFamily="18" charset="0"/>
                             <a:ea typeface="Source Sans Pro" panose="020B0503030403020204" pitchFamily="34" charset="0"/>
                           </a:rPr>
@@ -13535,7 +12521,7 @@
                         <m:ctrlPr>
                           <a:rPr lang="en-US" sz="2400" b="0" i="1" smtClean="0">
                             <a:latin typeface="Cambria Math" panose="02040503050406030204" pitchFamily="18" charset="0"/>
-                            <a:ea typeface="Cambria Math" panose="02040503050406030204" pitchFamily="18" charset="0"/>
+                            <a:ea typeface="Source Sans Pro" panose="020B0503030403020204" pitchFamily="34" charset="0"/>
                           </a:rPr>
                         </m:ctrlPr>
                       </m:dPr>
@@ -13718,7 +12704,7 @@
           <a:p>
             <a:fld id="{A234A547-62F0-8041-BD0E-CD79DC3D7E44}" type="datetime1">
               <a:rPr lang="en-US" smtClean="0"/>
-              <a:t>12/20/2025</a:t>
+              <a:t>8/13/26</a:t>
             </a:fld>
             <a:endParaRPr lang="en-US"/>
           </a:p>
@@ -13956,7 +12942,7 @@
                     <m:d>
                       <m:dPr>
                         <m:ctrlPr>
-                          <a:rPr lang="en-US" sz="2400" i="1">
+                          <a:rPr lang="en-US" sz="2400" b="0" i="1" smtClean="0">
                             <a:latin typeface="Cambria Math" panose="02040503050406030204" pitchFamily="18" charset="0"/>
                             <a:ea typeface="Source Sans Pro" panose="020B0503030403020204" pitchFamily="34" charset="0"/>
                           </a:rPr>
@@ -14012,7 +12998,7 @@
                         <m:ctrlPr>
                           <a:rPr lang="en-US" sz="2400" b="0" i="1" smtClean="0">
                             <a:latin typeface="Cambria Math" panose="02040503050406030204" pitchFamily="18" charset="0"/>
-                            <a:ea typeface="Cambria Math" panose="02040503050406030204" pitchFamily="18" charset="0"/>
+                            <a:ea typeface="Source Sans Pro" panose="020B0503030403020204" pitchFamily="34" charset="0"/>
                           </a:rPr>
                         </m:ctrlPr>
                       </m:dPr>
@@ -14149,7 +13135,7 @@
                     <m:d>
                       <m:dPr>
                         <m:ctrlPr>
-                          <a:rPr lang="en-US" sz="2400" i="1">
+                          <a:rPr lang="en-US" sz="2400" b="0" i="1" smtClean="0">
                             <a:latin typeface="Cambria Math" panose="02040503050406030204" pitchFamily="18" charset="0"/>
                             <a:ea typeface="Source Sans Pro" panose="020B0503030403020204" pitchFamily="34" charset="0"/>
                           </a:rPr>
@@ -14205,7 +13191,7 @@
                         <m:ctrlPr>
                           <a:rPr lang="en-US" sz="2400" b="0" i="1" smtClean="0">
                             <a:latin typeface="Cambria Math" panose="02040503050406030204" pitchFamily="18" charset="0"/>
-                            <a:ea typeface="Cambria Math" panose="02040503050406030204" pitchFamily="18" charset="0"/>
+                            <a:ea typeface="Source Sans Pro" panose="020B0503030403020204" pitchFamily="34" charset="0"/>
                           </a:rPr>
                         </m:ctrlPr>
                       </m:dPr>
@@ -14246,9 +13232,9 @@
                         <m:f>
                           <m:fPr>
                             <m:ctrlPr>
-                              <a:rPr lang="en-US" sz="2400" b="0" i="1" smtClean="0">
+                              <a:rPr lang="en-US" sz="2400" i="1">
                                 <a:latin typeface="Cambria Math" panose="02040503050406030204" pitchFamily="18" charset="0"/>
-                                <a:ea typeface="Source Sans Pro" panose="020B0503030403020204" pitchFamily="34" charset="0"/>
+                                <a:ea typeface="Cambria Math" panose="02040503050406030204" pitchFamily="18" charset="0"/>
                               </a:rPr>
                             </m:ctrlPr>
                           </m:fPr>
@@ -14363,7 +13349,7 @@
                             <m:ctrlPr>
                               <a:rPr lang="en-US" sz="2400" i="1">
                                 <a:latin typeface="Cambria Math" panose="02040503050406030204" pitchFamily="18" charset="0"/>
-                                <a:ea typeface="Source Sans Pro" panose="020B0503030403020204" pitchFamily="34" charset="0"/>
+                                <a:ea typeface="Cambria Math" panose="02040503050406030204" pitchFamily="18" charset="0"/>
                               </a:rPr>
                             </m:ctrlPr>
                           </m:fPr>
@@ -14591,7 +13577,7 @@
                         <m:sSub>
                           <m:sSubPr>
                             <m:ctrlPr>
-                              <a:rPr lang="en-US" sz="2400" i="1">
+                              <a:rPr lang="en-US" sz="2400" b="0" i="1" smtClean="0">
                                 <a:latin typeface="Cambria Math" panose="02040503050406030204" pitchFamily="18" charset="0"/>
                                 <a:ea typeface="Cambria Math" panose="02040503050406030204" pitchFamily="18" charset="0"/>
                               </a:rPr>
@@ -14633,7 +13619,7 @@
                         <m:sSub>
                           <m:sSubPr>
                             <m:ctrlPr>
-                              <a:rPr lang="en-US" sz="2400" i="1">
+                              <a:rPr lang="en-US" sz="2400" b="0" i="1" smtClean="0">
                                 <a:latin typeface="Cambria Math" panose="02040503050406030204" pitchFamily="18" charset="0"/>
                                 <a:ea typeface="Cambria Math" panose="02040503050406030204" pitchFamily="18" charset="0"/>
                               </a:rPr>
@@ -14715,7 +13701,7 @@
                     <m:sSub>
                       <m:sSubPr>
                         <m:ctrlPr>
-                          <a:rPr lang="en-US" sz="2400" i="1" smtClean="0">
+                          <a:rPr lang="en-US" sz="2400" b="0" i="1" smtClean="0">
                             <a:latin typeface="Cambria Math" panose="02040503050406030204" pitchFamily="18" charset="0"/>
                             <a:ea typeface="Source Sans Pro" panose="020B0503030403020204" pitchFamily="34" charset="0"/>
                           </a:rPr>
@@ -14908,15 +13894,12 @@
                             </m:ctrlPr>
                           </m:boxPr>
                           <m:e>
-                            <m:argPr>
-                              <m:argSz m:val="-1"/>
-                            </m:argPr>
                             <m:f>
                               <m:fPr>
                                 <m:ctrlPr>
                                   <a:rPr lang="en-US" sz="2400" i="1">
                                     <a:latin typeface="Cambria Math" panose="02040503050406030204" pitchFamily="18" charset="0"/>
-                                    <a:ea typeface="Source Sans Pro" panose="020B0503030403020204" pitchFamily="34" charset="0"/>
+                                    <a:ea typeface="Cambria Math" panose="02040503050406030204" pitchFamily="18" charset="0"/>
                                   </a:rPr>
                                 </m:ctrlPr>
                               </m:fPr>
@@ -14951,7 +13934,7 @@
                         <m:sSub>
                           <m:sSubPr>
                             <m:ctrlPr>
-                              <a:rPr lang="en-US" sz="2400" i="1" smtClean="0">
+                              <a:rPr lang="en-US" sz="2400" b="0" i="1" smtClean="0">
                                 <a:latin typeface="Cambria Math" panose="02040503050406030204" pitchFamily="18" charset="0"/>
                                 <a:ea typeface="Source Sans Pro" panose="020B0503030403020204" pitchFamily="34" charset="0"/>
                               </a:rPr>
@@ -15007,15 +13990,12 @@
                             </m:ctrlPr>
                           </m:boxPr>
                           <m:e>
-                            <m:argPr>
-                              <m:argSz m:val="-1"/>
-                            </m:argPr>
                             <m:f>
                               <m:fPr>
                                 <m:ctrlPr>
                                   <a:rPr lang="en-US" sz="2400" i="1">
                                     <a:latin typeface="Cambria Math" panose="02040503050406030204" pitchFamily="18" charset="0"/>
-                                    <a:ea typeface="Source Sans Pro" panose="020B0503030403020204" pitchFamily="34" charset="0"/>
+                                    <a:ea typeface="Cambria Math" panose="02040503050406030204" pitchFamily="18" charset="0"/>
                                   </a:rPr>
                                 </m:ctrlPr>
                               </m:fPr>
@@ -15154,15 +14134,12 @@
                             </m:ctrlPr>
                           </m:boxPr>
                           <m:e>
-                            <m:argPr>
-                              <m:argSz m:val="-1"/>
-                            </m:argPr>
                             <m:f>
                               <m:fPr>
                                 <m:ctrlPr>
                                   <a:rPr lang="en-US" sz="2400" i="1">
                                     <a:latin typeface="Cambria Math" panose="02040503050406030204" pitchFamily="18" charset="0"/>
-                                    <a:ea typeface="Source Sans Pro" panose="020B0503030403020204" pitchFamily="34" charset="0"/>
+                                    <a:ea typeface="Cambria Math" panose="02040503050406030204" pitchFamily="18" charset="0"/>
                                   </a:rPr>
                                 </m:ctrlPr>
                               </m:fPr>
@@ -15253,15 +14230,12 @@
                             </m:ctrlPr>
                           </m:boxPr>
                           <m:e>
-                            <m:argPr>
-                              <m:argSz m:val="-1"/>
-                            </m:argPr>
                             <m:f>
                               <m:fPr>
                                 <m:ctrlPr>
                                   <a:rPr lang="en-US" sz="2400" i="1">
                                     <a:latin typeface="Cambria Math" panose="02040503050406030204" pitchFamily="18" charset="0"/>
-                                    <a:ea typeface="Source Sans Pro" panose="020B0503030403020204" pitchFamily="34" charset="0"/>
+                                    <a:ea typeface="Cambria Math" panose="02040503050406030204" pitchFamily="18" charset="0"/>
                                   </a:rPr>
                                 </m:ctrlPr>
                               </m:fPr>
@@ -15534,7 +14508,7 @@
           <a:p>
             <a:fld id="{5BD95119-DB35-0F4A-A3F0-F63ADEC622CC}" type="datetime1">
               <a:rPr lang="en-US" smtClean="0"/>
-              <a:t>12/20/2025</a:t>
+              <a:t>8/13/26</a:t>
             </a:fld>
             <a:endParaRPr lang="en-US"/>
           </a:p>
@@ -15861,7 +14835,7 @@
                     <m:d>
                       <m:dPr>
                         <m:ctrlPr>
-                          <a:rPr lang="en-US" i="1">
+                          <a:rPr lang="en-US" i="1" smtClean="0">
                             <a:latin typeface="Cambria Math" panose="02040503050406030204" pitchFamily="18" charset="0"/>
                             <a:ea typeface="Cambria Math" panose="02040503050406030204" pitchFamily="18" charset="0"/>
                           </a:rPr>
@@ -16270,7 +15244,7 @@
           <a:p>
             <a:fld id="{2F092F83-E8C1-0346-9B1C-D3CA0A616080}" type="datetime1">
               <a:rPr lang="en-US" smtClean="0"/>
-              <a:t>12/20/2025</a:t>
+              <a:t>8/13/26</a:t>
             </a:fld>
             <a:endParaRPr lang="en-US"/>
           </a:p>
@@ -16503,7 +15477,7 @@
           <a:p>
             <a:fld id="{739959FD-2ADA-964B-BA55-A812A1F03CFC}" type="datetime1">
               <a:rPr lang="en-US" smtClean="0"/>
-              <a:t>12/20/2025</a:t>
+              <a:t>8/13/26</a:t>
             </a:fld>
             <a:endParaRPr lang="en-US"/>
           </a:p>
@@ -16793,7 +15767,7 @@
           <a:p>
             <a:fld id="{2AFB0568-E0CA-DF4C-A770-ACF978993DE1}" type="datetime1">
               <a:rPr lang="en-US" smtClean="0"/>
-              <a:t>12/20/2025</a:t>
+              <a:t>8/13/26</a:t>
             </a:fld>
             <a:endParaRPr lang="en-US"/>
           </a:p>
